--- a/sam_journey.pptx
+++ b/sam_journey.pptx
@@ -3503,8 +3503,8 @@
         </p:nvSpPr>
         <p:spPr>
           <a:xfrm>
-            <a:off x="3352990" y="285750"/>
-            <a:ext cx="5486019" cy="520065"/>
+            <a:off x="3669030" y="323850"/>
+            <a:ext cx="4853939" cy="600075"/>
           </a:xfrm>
           <a:prstGeom prst="roundRect">
             <a:avLst>
@@ -3539,13 +3539,13 @@
           <a:p>
             <a:pPr algn="ctr"/>
             <a:r>
-              <a:rPr sz="2600" b="1">
+              <a:rPr sz="3000" b="1">
                 <a:solidFill>
                   <a:srgbClr val="FFFFFF"/>
                 </a:solidFill>
                 <a:latin typeface="Arial"/>
               </a:rPr>
-              <a:t>Zooming in: can you find Vietnam?</a:t>
+              <a:t>Can you find Vietnam?</a:t>
             </a:r>
           </a:p>
         </p:txBody>
@@ -3644,8 +3644,8 @@
         </p:nvSpPr>
         <p:spPr>
           <a:xfrm>
-            <a:off x="4770310" y="323850"/>
-            <a:ext cx="2651379" cy="360045"/>
+            <a:off x="4533138" y="323850"/>
+            <a:ext cx="3125723" cy="360045"/>
           </a:xfrm>
           <a:prstGeom prst="roundRect">
             <a:avLst>
@@ -4020,8 +4020,8 @@
         </p:nvSpPr>
         <p:spPr>
           <a:xfrm>
-            <a:off x="4982908" y="323850"/>
-            <a:ext cx="2226183" cy="360045"/>
+            <a:off x="4780026" y="323850"/>
+            <a:ext cx="2631948" cy="360045"/>
           </a:xfrm>
           <a:prstGeom prst="roundRect">
             <a:avLst>
@@ -4477,8 +4477,8 @@
         </p:nvSpPr>
         <p:spPr>
           <a:xfrm>
-            <a:off x="4982908" y="323850"/>
-            <a:ext cx="2226183" cy="360045"/>
+            <a:off x="4780026" y="323850"/>
+            <a:ext cx="2631948" cy="360045"/>
           </a:xfrm>
           <a:prstGeom prst="roundRect">
             <a:avLst>
@@ -4853,8 +4853,8 @@
         </p:nvSpPr>
         <p:spPr>
           <a:xfrm>
-            <a:off x="4982908" y="323850"/>
-            <a:ext cx="2226183" cy="360045"/>
+            <a:off x="4780026" y="323850"/>
+            <a:ext cx="2631948" cy="360045"/>
           </a:xfrm>
           <a:prstGeom prst="roundRect">
             <a:avLst>
@@ -5229,8 +5229,8 @@
         </p:nvSpPr>
         <p:spPr>
           <a:xfrm>
-            <a:off x="4982908" y="323850"/>
-            <a:ext cx="2226183" cy="360045"/>
+            <a:off x="4780026" y="323850"/>
+            <a:ext cx="2631948" cy="360045"/>
           </a:xfrm>
           <a:prstGeom prst="roundRect">
             <a:avLst>
@@ -9901,8 +9901,8 @@
         </p:nvSpPr>
         <p:spPr>
           <a:xfrm>
-            <a:off x="4291965" y="323850"/>
-            <a:ext cx="3608070" cy="360045"/>
+            <a:off x="3977640" y="323850"/>
+            <a:ext cx="4236720" cy="360045"/>
           </a:xfrm>
           <a:prstGeom prst="roundRect">
             <a:avLst>
@@ -10257,8 +10257,8 @@
         </p:nvSpPr>
         <p:spPr>
           <a:xfrm>
-            <a:off x="4291965" y="323850"/>
-            <a:ext cx="3608070" cy="360045"/>
+            <a:off x="3977640" y="323850"/>
+            <a:ext cx="4236720" cy="360045"/>
           </a:xfrm>
           <a:prstGeom prst="roundRect">
             <a:avLst>
@@ -10613,8 +10613,8 @@
         </p:nvSpPr>
         <p:spPr>
           <a:xfrm>
-            <a:off x="4291965" y="323850"/>
-            <a:ext cx="3608070" cy="360045"/>
+            <a:off x="3977640" y="323850"/>
+            <a:ext cx="4236720" cy="360045"/>
           </a:xfrm>
           <a:prstGeom prst="roundRect">
             <a:avLst>
@@ -10969,8 +10969,8 @@
         </p:nvSpPr>
         <p:spPr>
           <a:xfrm>
-            <a:off x="4291965" y="323850"/>
-            <a:ext cx="3608070" cy="360045"/>
+            <a:off x="3977640" y="323850"/>
+            <a:ext cx="4236720" cy="360045"/>
           </a:xfrm>
           <a:prstGeom prst="roundRect">
             <a:avLst>
